--- a/AI_for_Operations_Course/Slides/Class_03_Demand_Forecasting_ML.pptx
+++ b/AI_for_Operations_Course/Slides/Class_03_Demand_Forecasting_ML.pptx
@@ -1933,6 +1933,10 @@
           </a:solidFill>
           <a:ln/>
         </p:spPr>
+        <p:txBody>
+          <a:bodyPr/>
+          <a:p/>
+        </p:txBody>
       </p:sp>
       <p:sp>
         <p:nvSpPr>
@@ -1992,6 +1996,10 @@
           </a:solidFill>
           <a:ln/>
         </p:spPr>
+        <p:txBody>
+          <a:bodyPr/>
+          <a:p/>
+        </p:txBody>
       </p:sp>
       <p:sp>
         <p:nvSpPr>
@@ -2051,6 +2059,10 @@
           </a:solidFill>
           <a:ln/>
         </p:spPr>
+        <p:txBody>
+          <a:bodyPr/>
+          <a:p/>
+        </p:txBody>
       </p:sp>
       <p:sp>
         <p:nvSpPr>
@@ -2110,6 +2122,10 @@
           </a:solidFill>
           <a:ln/>
         </p:spPr>
+        <p:txBody>
+          <a:bodyPr/>
+          <a:p/>
+        </p:txBody>
       </p:sp>
       <p:sp>
         <p:nvSpPr>
@@ -2169,6 +2185,10 @@
           </a:solidFill>
           <a:ln/>
         </p:spPr>
+        <p:txBody>
+          <a:bodyPr/>
+          <a:p/>
+        </p:txBody>
       </p:sp>
       <p:sp>
         <p:nvSpPr>
@@ -2228,6 +2248,10 @@
           </a:solidFill>
           <a:ln/>
         </p:spPr>
+        <p:txBody>
+          <a:bodyPr/>
+          <a:p/>
+        </p:txBody>
       </p:sp>
       <p:sp>
         <p:nvSpPr>
@@ -2287,6 +2311,10 @@
           </a:solidFill>
           <a:ln/>
         </p:spPr>
+        <p:txBody>
+          <a:bodyPr/>
+          <a:p/>
+        </p:txBody>
       </p:sp>
       <p:sp>
         <p:nvSpPr>
@@ -2470,7 +2498,7 @@
                 <a:ea typeface="Calibri" pitchFamily="34" charset="-122"/>
                 <a:cs typeface="Calibri" pitchFamily="34" charset="-120"/>
               </a:rPr>
-              <a:t>Proxiant Academy — www.proxiant.com</a:t>
+              <a:t>Proxiant Academy | proxiant.ai</a:t>
             </a:r>
             <a:endParaRPr lang="en-US" sz="1600" dirty="0"/>
           </a:p>
@@ -2566,6 +2594,10 @@
           </a:solidFill>
           <a:ln/>
         </p:spPr>
+        <p:txBody>
+          <a:bodyPr/>
+          <a:p/>
+        </p:txBody>
       </p:sp>
       <p:sp>
         <p:nvSpPr>
@@ -2976,6 +3008,10 @@
           </a:solidFill>
           <a:ln/>
         </p:spPr>
+        <p:txBody>
+          <a:bodyPr/>
+          <a:p/>
+        </p:txBody>
       </p:sp>
       <p:sp>
         <p:nvSpPr>
@@ -3035,6 +3071,10 @@
           </a:solidFill>
           <a:ln/>
         </p:spPr>
+        <p:txBody>
+          <a:bodyPr/>
+          <a:p/>
+        </p:txBody>
       </p:sp>
       <p:sp>
         <p:nvSpPr>
@@ -3172,6 +3212,10 @@
           </a:solidFill>
           <a:ln/>
         </p:spPr>
+        <p:txBody>
+          <a:bodyPr/>
+          <a:p/>
+        </p:txBody>
       </p:sp>
       <p:sp>
         <p:nvSpPr>
@@ -3231,6 +3275,10 @@
           </a:solidFill>
           <a:ln/>
         </p:spPr>
+        <p:txBody>
+          <a:bodyPr/>
+          <a:p/>
+        </p:txBody>
       </p:sp>
       <p:sp>
         <p:nvSpPr>
@@ -3368,6 +3416,10 @@
           </a:solidFill>
           <a:ln/>
         </p:spPr>
+        <p:txBody>
+          <a:bodyPr/>
+          <a:p/>
+        </p:txBody>
       </p:sp>
       <p:sp>
         <p:nvSpPr>
@@ -3427,6 +3479,10 @@
           </a:solidFill>
           <a:ln/>
         </p:spPr>
+        <p:txBody>
+          <a:bodyPr/>
+          <a:p/>
+        </p:txBody>
       </p:sp>
       <p:sp>
         <p:nvSpPr>
@@ -3564,6 +3620,10 @@
           </a:solidFill>
           <a:ln/>
         </p:spPr>
+        <p:txBody>
+          <a:bodyPr/>
+          <a:p/>
+        </p:txBody>
       </p:sp>
       <p:sp>
         <p:nvSpPr>
@@ -3694,6 +3754,10 @@
           </a:solidFill>
           <a:ln/>
         </p:spPr>
+        <p:txBody>
+          <a:bodyPr/>
+          <a:p/>
+        </p:txBody>
       </p:sp>
       <p:sp>
         <p:nvSpPr>
@@ -3753,6 +3817,10 @@
           </a:solidFill>
           <a:ln/>
         </p:spPr>
+        <p:txBody>
+          <a:bodyPr/>
+          <a:p/>
+        </p:txBody>
       </p:sp>
       <p:sp>
         <p:nvSpPr>
@@ -3812,6 +3880,10 @@
           </a:solidFill>
           <a:ln/>
         </p:spPr>
+        <p:txBody>
+          <a:bodyPr/>
+          <a:p/>
+        </p:txBody>
       </p:sp>
       <p:sp>
         <p:nvSpPr>
@@ -3871,6 +3943,10 @@
           </a:solidFill>
           <a:ln/>
         </p:spPr>
+        <p:txBody>
+          <a:bodyPr/>
+          <a:p/>
+        </p:txBody>
       </p:sp>
       <p:sp>
         <p:nvSpPr>
@@ -3930,6 +4006,10 @@
           </a:solidFill>
           <a:ln/>
         </p:spPr>
+        <p:txBody>
+          <a:bodyPr/>
+          <a:p/>
+        </p:txBody>
       </p:sp>
       <p:sp>
         <p:nvSpPr>
@@ -4067,6 +4147,10 @@
           </a:solidFill>
           <a:ln/>
         </p:spPr>
+        <p:txBody>
+          <a:bodyPr/>
+          <a:p/>
+        </p:txBody>
       </p:sp>
       <p:sp>
         <p:nvSpPr>
@@ -4204,6 +4288,10 @@
           </a:solidFill>
           <a:ln/>
         </p:spPr>
+        <p:txBody>
+          <a:bodyPr/>
+          <a:p/>
+        </p:txBody>
       </p:sp>
       <p:sp>
         <p:nvSpPr>
@@ -4341,6 +4429,10 @@
           </a:solidFill>
           <a:ln/>
         </p:spPr>
+        <p:txBody>
+          <a:bodyPr/>
+          <a:p/>
+        </p:txBody>
       </p:sp>
       <p:sp>
         <p:nvSpPr>
@@ -4478,6 +4570,10 @@
           </a:solidFill>
           <a:ln/>
         </p:spPr>
+        <p:txBody>
+          <a:bodyPr/>
+          <a:p/>
+        </p:txBody>
       </p:sp>
       <p:sp>
         <p:nvSpPr>
@@ -4686,6 +4782,10 @@
           </a:solidFill>
           <a:ln/>
         </p:spPr>
+        <p:txBody>
+          <a:bodyPr/>
+          <a:p/>
+        </p:txBody>
       </p:sp>
       <p:sp>
         <p:nvSpPr>
@@ -4828,6 +4928,10 @@
             <a:prstDash val="solid"/>
           </a:ln>
         </p:spPr>
+        <p:txBody>
+          <a:bodyPr/>
+          <a:p/>
+        </p:txBody>
       </p:sp>
       <p:sp>
         <p:nvSpPr>
@@ -4970,6 +5074,10 @@
             <a:prstDash val="solid"/>
           </a:ln>
         </p:spPr>
+        <p:txBody>
+          <a:bodyPr/>
+          <a:p/>
+        </p:txBody>
       </p:sp>
       <p:sp>
         <p:nvSpPr>
@@ -5112,6 +5220,10 @@
             <a:prstDash val="solid"/>
           </a:ln>
         </p:spPr>
+        <p:txBody>
+          <a:bodyPr/>
+          <a:p/>
+        </p:txBody>
       </p:sp>
       <p:sp>
         <p:nvSpPr>
@@ -5242,6 +5354,10 @@
           </a:solidFill>
           <a:ln/>
         </p:spPr>
+        <p:txBody>
+          <a:bodyPr/>
+          <a:p/>
+        </p:txBody>
       </p:sp>
       <p:sp>
         <p:nvSpPr>
@@ -5301,6 +5417,10 @@
           </a:solidFill>
           <a:ln/>
         </p:spPr>
+        <p:txBody>
+          <a:bodyPr/>
+          <a:p/>
+        </p:txBody>
       </p:sp>
       <p:sp>
         <p:nvSpPr>
@@ -5363,6 +5483,10 @@
             <a:prstDash val="solid"/>
           </a:ln>
         </p:spPr>
+        <p:txBody>
+          <a:bodyPr/>
+          <a:p/>
+        </p:txBody>
       </p:sp>
       <p:sp>
         <p:nvSpPr>
@@ -5383,6 +5507,10 @@
           </a:solidFill>
           <a:ln/>
         </p:spPr>
+        <p:txBody>
+          <a:bodyPr/>
+          <a:p/>
+        </p:txBody>
       </p:sp>
       <p:sp>
         <p:nvSpPr>
@@ -5445,6 +5573,10 @@
             <a:prstDash val="solid"/>
           </a:ln>
         </p:spPr>
+        <p:txBody>
+          <a:bodyPr/>
+          <a:p/>
+        </p:txBody>
       </p:sp>
       <p:sp>
         <p:nvSpPr>
@@ -5465,6 +5597,10 @@
           </a:solidFill>
           <a:ln/>
         </p:spPr>
+        <p:txBody>
+          <a:bodyPr/>
+          <a:p/>
+        </p:txBody>
       </p:sp>
       <p:sp>
         <p:nvSpPr>
@@ -5527,6 +5663,10 @@
             <a:prstDash val="solid"/>
           </a:ln>
         </p:spPr>
+        <p:txBody>
+          <a:bodyPr/>
+          <a:p/>
+        </p:txBody>
       </p:sp>
       <p:sp>
         <p:nvSpPr>
@@ -5547,6 +5687,10 @@
           </a:solidFill>
           <a:ln/>
         </p:spPr>
+        <p:txBody>
+          <a:bodyPr/>
+          <a:p/>
+        </p:txBody>
       </p:sp>
       <p:sp>
         <p:nvSpPr>
@@ -5606,6 +5750,10 @@
           </a:solidFill>
           <a:ln/>
         </p:spPr>
+        <p:txBody>
+          <a:bodyPr/>
+          <a:p/>
+        </p:txBody>
       </p:sp>
       <p:sp>
         <p:nvSpPr>
@@ -5665,6 +5813,10 @@
           </a:solidFill>
           <a:ln/>
         </p:spPr>
+        <p:txBody>
+          <a:bodyPr/>
+          <a:p/>
+        </p:txBody>
       </p:sp>
       <p:sp>
         <p:nvSpPr>
@@ -5724,6 +5876,10 @@
           </a:solidFill>
           <a:ln/>
         </p:spPr>
+        <p:txBody>
+          <a:bodyPr/>
+          <a:p/>
+        </p:txBody>
       </p:sp>
       <p:sp>
         <p:nvSpPr>
@@ -5783,6 +5939,10 @@
           </a:solidFill>
           <a:ln/>
         </p:spPr>
+        <p:txBody>
+          <a:bodyPr/>
+          <a:p/>
+        </p:txBody>
       </p:sp>
       <p:sp>
         <p:nvSpPr>
@@ -5842,6 +6002,10 @@
           </a:solidFill>
           <a:ln/>
         </p:spPr>
+        <p:txBody>
+          <a:bodyPr/>
+          <a:p/>
+        </p:txBody>
       </p:sp>
       <p:sp>
         <p:nvSpPr>
@@ -5901,6 +6065,10 @@
           </a:solidFill>
           <a:ln/>
         </p:spPr>
+        <p:txBody>
+          <a:bodyPr/>
+          <a:p/>
+        </p:txBody>
       </p:sp>
       <p:sp>
         <p:nvSpPr>
@@ -6265,6 +6433,10 @@
           </a:solidFill>
           <a:ln/>
         </p:spPr>
+        <p:txBody>
+          <a:bodyPr/>
+          <a:p/>
+        </p:txBody>
       </p:sp>
       <p:sp>
         <p:nvSpPr>
@@ -6329,6 +6501,10 @@
             <a:prstDash val="solid"/>
           </a:ln>
         </p:spPr>
+        <p:txBody>
+          <a:bodyPr/>
+          <a:p/>
+        </p:txBody>
       </p:sp>
       <p:sp>
         <p:nvSpPr>
@@ -6893,6 +7069,10 @@
           </a:solidFill>
           <a:ln/>
         </p:spPr>
+        <p:txBody>
+          <a:bodyPr/>
+          <a:p/>
+        </p:txBody>
       </p:sp>
       <p:sp>
         <p:nvSpPr>
@@ -7374,6 +7554,10 @@
           </a:solidFill>
           <a:ln/>
         </p:spPr>
+        <p:txBody>
+          <a:bodyPr/>
+          <a:p/>
+        </p:txBody>
       </p:sp>
       <p:sp>
         <p:nvSpPr>
@@ -7638,6 +7822,10 @@
             <a:prstDash val="solid"/>
           </a:ln>
         </p:spPr>
+        <p:txBody>
+          <a:bodyPr/>
+          <a:p/>
+        </p:txBody>
       </p:sp>
       <p:sp>
         <p:nvSpPr>
